--- a/front-pages/01-cover.pptx
+++ b/front-pages/01-cover.pptx
@@ -259,7 +259,7 @@
           <a:p>
             <a:fld id="{5EFE341F-6060-472D-9C36-D29929FC608A}" type="datetimeFigureOut">
               <a:rPr lang="en-US" smtClean="0"/>
-              <a:t>10/27/2026</a:t>
+              <a:t>10/29/2026</a:t>
             </a:fld>
             <a:endParaRPr lang="en-US"/>
           </a:p>
@@ -457,7 +457,7 @@
           <a:p>
             <a:fld id="{5EFE341F-6060-472D-9C36-D29929FC608A}" type="datetimeFigureOut">
               <a:rPr lang="en-US" smtClean="0"/>
-              <a:t>10/27/2026</a:t>
+              <a:t>10/29/2026</a:t>
             </a:fld>
             <a:endParaRPr lang="en-US"/>
           </a:p>
@@ -665,7 +665,7 @@
           <a:p>
             <a:fld id="{5EFE341F-6060-472D-9C36-D29929FC608A}" type="datetimeFigureOut">
               <a:rPr lang="en-US" smtClean="0"/>
-              <a:t>10/27/2026</a:t>
+              <a:t>10/29/2026</a:t>
             </a:fld>
             <a:endParaRPr lang="en-US"/>
           </a:p>
@@ -863,7 +863,7 @@
           <a:p>
             <a:fld id="{5EFE341F-6060-472D-9C36-D29929FC608A}" type="datetimeFigureOut">
               <a:rPr lang="en-US" smtClean="0"/>
-              <a:t>10/27/2026</a:t>
+              <a:t>10/29/2026</a:t>
             </a:fld>
             <a:endParaRPr lang="en-US"/>
           </a:p>
@@ -1138,7 +1138,7 @@
           <a:p>
             <a:fld id="{5EFE341F-6060-472D-9C36-D29929FC608A}" type="datetimeFigureOut">
               <a:rPr lang="en-US" smtClean="0"/>
-              <a:t>10/27/2026</a:t>
+              <a:t>10/29/2026</a:t>
             </a:fld>
             <a:endParaRPr lang="en-US"/>
           </a:p>
@@ -1403,7 +1403,7 @@
           <a:p>
             <a:fld id="{5EFE341F-6060-472D-9C36-D29929FC608A}" type="datetimeFigureOut">
               <a:rPr lang="en-US" smtClean="0"/>
-              <a:t>10/27/2026</a:t>
+              <a:t>10/29/2026</a:t>
             </a:fld>
             <a:endParaRPr lang="en-US"/>
           </a:p>
@@ -1815,7 +1815,7 @@
           <a:p>
             <a:fld id="{5EFE341F-6060-472D-9C36-D29929FC608A}" type="datetimeFigureOut">
               <a:rPr lang="en-US" smtClean="0"/>
-              <a:t>10/27/2026</a:t>
+              <a:t>10/29/2026</a:t>
             </a:fld>
             <a:endParaRPr lang="en-US"/>
           </a:p>
@@ -1956,7 +1956,7 @@
           <a:p>
             <a:fld id="{5EFE341F-6060-472D-9C36-D29929FC608A}" type="datetimeFigureOut">
               <a:rPr lang="en-US" smtClean="0"/>
-              <a:t>10/27/2026</a:t>
+              <a:t>10/29/2026</a:t>
             </a:fld>
             <a:endParaRPr lang="en-US"/>
           </a:p>
@@ -2069,7 +2069,7 @@
           <a:p>
             <a:fld id="{5EFE341F-6060-472D-9C36-D29929FC608A}" type="datetimeFigureOut">
               <a:rPr lang="en-US" smtClean="0"/>
-              <a:t>10/27/2026</a:t>
+              <a:t>10/29/2026</a:t>
             </a:fld>
             <a:endParaRPr lang="en-US"/>
           </a:p>
@@ -2380,7 +2380,7 @@
           <a:p>
             <a:fld id="{5EFE341F-6060-472D-9C36-D29929FC608A}" type="datetimeFigureOut">
               <a:rPr lang="en-US" smtClean="0"/>
-              <a:t>10/27/2026</a:t>
+              <a:t>10/29/2026</a:t>
             </a:fld>
             <a:endParaRPr lang="en-US"/>
           </a:p>
@@ -2668,7 +2668,7 @@
           <a:p>
             <a:fld id="{5EFE341F-6060-472D-9C36-D29929FC608A}" type="datetimeFigureOut">
               <a:rPr lang="en-US" smtClean="0"/>
-              <a:t>10/27/2026</a:t>
+              <a:t>10/29/2026</a:t>
             </a:fld>
             <a:endParaRPr lang="en-US"/>
           </a:p>
@@ -2909,7 +2909,7 @@
           <a:p>
             <a:fld id="{5EFE341F-6060-472D-9C36-D29929FC608A}" type="datetimeFigureOut">
               <a:rPr lang="en-US" smtClean="0"/>
-              <a:t>10/27/2026</a:t>
+              <a:t>10/29/2026</a:t>
             </a:fld>
             <a:endParaRPr lang="en-US"/>
           </a:p>
@@ -3328,10 +3328,10 @@
       </p:grpSpPr>
       <p:pic>
         <p:nvPicPr>
-          <p:cNvPr id="3" name="Cover illustration">
-            <a:extLst>
-              <a:ext uri="{FF2B5EF4-FFF2-40B4-BE49-F238E27FC236}">
-                <a16:creationId xmlns:a16="http://schemas.microsoft.com/office/drawing/2014/main" id="{F59C3543-7ABE-5459-A772-36FE5D832624}"/>
+          <p:cNvPr id="4" name="Cover illustration">
+            <a:extLst>
+              <a:ext uri="{FF2B5EF4-FFF2-40B4-BE49-F238E27FC236}">
+                <a16:creationId xmlns:a16="http://schemas.microsoft.com/office/drawing/2014/main" id="{F55CA538-FDE7-9C13-AEC6-015F699FA65A}"/>
               </a:ext>
             </a:extLst>
           </p:cNvPr>
@@ -3595,7 +3595,7 @@
                 </a:solidFill>
                 <a:latin typeface="Arial" panose="020B0604020202020204" pitchFamily="34" charset="0"/>
               </a:rPr>
-              <a:t>Materiale- og overfladeteknologi</a:t>
+              <a:t>Materiale- og Overfladeteknologi</a:t>
             </a:r>
           </a:p>
         </p:txBody>
@@ -3777,54 +3777,6 @@
                 <a:latin typeface="Arial" panose="020B0604020202020204" pitchFamily="34" charset="0"/>
               </a:rPr>
               <a:t>Substrate</a:t>
-            </a:r>
-          </a:p>
-        </p:txBody>
-      </p:sp>
-      <p:sp>
-        <p:nvSpPr>
-          <p:cNvPr id="14" name="Label atoms">
-            <a:extLst>
-              <a:ext uri="{FF2B5EF4-FFF2-40B4-BE49-F238E27FC236}">
-                <a16:creationId xmlns:a16="http://schemas.microsoft.com/office/drawing/2014/main" id="{878B3170-F62B-C198-A2F0-AE873C94B38A}"/>
-              </a:ext>
-            </a:extLst>
-          </p:cNvPr>
-          <p:cNvSpPr txBox="1"/>
-          <p:nvPr/>
-        </p:nvSpPr>
-        <p:spPr>
-          <a:xfrm>
-            <a:off x="2921000" y="9398000"/>
-            <a:ext cx="3810000" cy="369332"/>
-          </a:xfrm>
-          <a:prstGeom prst="rect">
-            <a:avLst/>
-          </a:prstGeom>
-          <a:noFill/>
-        </p:spPr>
-        <p:txBody>
-          <a:bodyPr vert="horz" wrap="square" lIns="0" tIns="0" rIns="0" bIns="0" rtlCol="0">
-            <a:noAutofit/>
-          </a:bodyPr>
-          <a:lstStyle/>
-          <a:p>
-            <a:pPr algn="ctr"/>
-            <a:r>
-              <a:rPr lang="en-US" sz="1600" dirty="0">
-                <a:solidFill>
-                  <a:srgbClr val="E9ECF1"/>
-                </a:solidFill>
-                <a:effectLst>
-                  <a:outerShdw blurRad="50800" dist="12700" dir="5400000" rotWithShape="0">
-                    <a:srgbClr val="000000">
-                      <a:alpha val="75000"/>
-                    </a:srgbClr>
-                  </a:outerShdw>
-                </a:effectLst>
-                <a:latin typeface="Arial" panose="020B0604020202020204" pitchFamily="34" charset="0"/>
-              </a:rPr>
-              <a:t>Atomic structure at the interface</a:t>
             </a:r>
           </a:p>
         </p:txBody>
